--- a/Topic_B/Exam_Practice/TB-L07_Writing_Workshop_Clothes_Accessories_and_Shopping.pptx
+++ b/Topic_B/Exam_Practice/TB-L07_Writing_Workshop_Clothes_Accessories_and_Shopping.pptx
@@ -784,7 +784,11 @@
           <a:lstStyle/>
           <a:p>
             <a:r>
-              <a:rPr lang="en-US" dirty="0"/>
+              <a:rPr lang="ar-SA" dirty="0">
+                <a:latin typeface="Amiri" pitchFamily="2" charset="-78"/>
+                <a:ea typeface="Amiri" pitchFamily="2" charset="-78"/>
+                <a:cs typeface="Amiri" pitchFamily="2" charset="-78"/>
+              </a:rPr>
               <a:t>Q3 (3 min to choose and read). Title (أ) suits Core and Develop; title (ب) suits Stretch.</a:t>
             </a:r>
             <a:endParaRPr lang="en-US" dirty="0"/>
@@ -1403,7 +1407,11 @@
           <a:lstStyle/>
           <a:p>
             <a:r>
-              <a:rPr lang="en-US" dirty="0"/>
+              <a:rPr lang="ar-SA" dirty="0">
+                <a:latin typeface="Amiri" pitchFamily="2" charset="-78"/>
+                <a:ea typeface="Amiri" pitchFamily="2" charset="-78"/>
+                <a:cs typeface="Amiri" pitchFamily="2" charset="-78"/>
+              </a:rPr>
               <a:t>WELCOME (1 min) — while students join.
 • Greet each student by name as they arrive: السَّلَامُ عَلَيْكُمْ. Take the register (Pastoral Tracker: attendance 0/1).
 • 2-MINUTE CHECK-IN (SEND training): a private chat to any student who seemed unsettled last lesson — “Are you okay today? 👍 / 👎”.
@@ -1936,7 +1944,11 @@
           <a:lstStyle/>
           <a:p>
             <a:r>
-              <a:rPr lang="en-US" dirty="0"/>
+              <a:rPr lang="ar-SA" dirty="0">
+                <a:latin typeface="Amiri" pitchFamily="2" charset="-78"/>
+                <a:ea typeface="Amiri" pitchFamily="2" charset="-78"/>
+                <a:cs typeface="Amiri" pitchFamily="2" charset="-78"/>
+              </a:rPr>
               <a:t>Question words: أَيْنَ (where) · مَعَ مَنْ (with whom) · لِمَاذَا (why) · مَاذَا (what) · هَلْ … أَمْ (… or …) · مَتَى (when) — bullet 3: lam tashtarihi = you did NOT buy it.</a:t>
             </a:r>
             <a:endParaRPr lang="en-US" dirty="0"/>
@@ -2508,6 +2520,7 @@
                   <a:srgbClr val="D4AF37"/>
                 </a:solidFill>
                 <a:latin typeface="Amiri" pitchFamily="2" charset="-78"/>
+                <a:ea typeface="Amiri" pitchFamily="2" charset="-78"/>
                 <a:cs typeface="Amiri" pitchFamily="2" charset="-78"/>
               </a:rPr>
               <a:t>م</a:t>
@@ -2714,6 +2727,7 @@
                   <a:srgbClr val="D4AF37"/>
                 </a:solidFill>
                 <a:latin typeface="Amiri" pitchFamily="2" charset="-78"/>
+                <a:ea typeface="Amiri" pitchFamily="2" charset="-78"/>
                 <a:cs typeface="Amiri" pitchFamily="2" charset="-78"/>
               </a:rPr>
               <a:t>وَرْشَةُ الكِتَابَةِ — المَلَابِسُ وَالتَّسَوُّقُ</a:t>
@@ -3171,6 +3185,7 @@
                   <a:srgbClr val="D4AF37"/>
                 </a:solidFill>
                 <a:latin typeface="Amiri" pitchFamily="2" charset="-78"/>
+                <a:ea typeface="Amiri" pitchFamily="2" charset="-78"/>
                 <a:cs typeface="Amiri" pitchFamily="2" charset="-78"/>
               </a:rPr>
               <a:t>م</a:t>
@@ -3491,6 +3506,7 @@
                   <a:srgbClr val="8A6D1E"/>
                 </a:solidFill>
                 <a:latin typeface="Amiri" pitchFamily="2" charset="-78"/>
+                <a:ea typeface="Amiri" pitchFamily="2" charset="-78"/>
                 <a:cs typeface="Amiri" pitchFamily="2" charset="-78"/>
               </a:rPr>
               <a:t>نَمُوذَجُ الإِجَابَةِ</a:t>
@@ -3604,6 +3620,7 @@
                   <a:srgbClr val="1F2A37"/>
                 </a:solidFill>
                 <a:latin typeface="Amiri" pitchFamily="2" charset="-78"/>
+                <a:ea typeface="Amiri" pitchFamily="2" charset="-78"/>
                 <a:cs typeface="Amiri" pitchFamily="2" charset="-78"/>
               </a:rPr>
               <a:t>مَرْحَبًا يَا يُوسُفُ،</a:t>
@@ -3623,6 +3640,7 @@
                   <a:srgbClr val="1F2A37"/>
                 </a:solidFill>
                 <a:latin typeface="Amiri" pitchFamily="2" charset="-78"/>
+                <a:ea typeface="Amiri" pitchFamily="2" charset="-78"/>
                 <a:cs typeface="Amiri" pitchFamily="2" charset="-78"/>
               </a:rPr>
               <a:t>كَيْفَ حَالُكَ؟ أَمْسِ ذَهَبْتُ إِلَى المَرْكَزِ التِّجَارِيِّ مَعَ أَبِي، لِأَنَّ عِنْدِي حَفْلَةً فِي نِهَايَةِ الأُسْبُوعِ. اشْتَرَيْتُ قَمِيصًا أَبْيَضَ وَبِنْطَالًا أَزْرَقَ غَامِقًا. جَرَّبْتُ سُتْرَةً سَوْدَاءَ أَيْضًا، لٰكِنَّهَا كَانَتْ ضَيِّقَةً. القَمِيصُ بِعِشْرِينَ جُنَيْهًا، وَالبِنْطَالُ بِثَلَاثِينَ. البِنْطَالُ أَغْلَى مِنَ القَمِيصِ، لٰكِنَّهُ جَمِيلٌ جِدًّا. أُفَضِّلُ التَّسَوُّقَ فِي المَحَلَّاتِ، لِأَنِّي أُجَرِّبُ المَلَابِسَ. سَأَلْبَسُهَا فِي الحَفْلَةِ يَوْمَ السَّبْتِ.</a:t>
@@ -3642,6 +3660,7 @@
                   <a:srgbClr val="1F2A37"/>
                 </a:solidFill>
                 <a:latin typeface="Amiri" pitchFamily="2" charset="-78"/>
+                <a:ea typeface="Amiri" pitchFamily="2" charset="-78"/>
                 <a:cs typeface="Amiri" pitchFamily="2" charset="-78"/>
               </a:rPr>
               <a:t>مَعَ السَّلَامَةِ،</a:t>
@@ -3661,6 +3680,7 @@
                   <a:srgbClr val="1F2A37"/>
                 </a:solidFill>
                 <a:latin typeface="Amiri" pitchFamily="2" charset="-78"/>
+                <a:ea typeface="Amiri" pitchFamily="2" charset="-78"/>
                 <a:cs typeface="Amiri" pitchFamily="2" charset="-78"/>
               </a:rPr>
               <a:t>آدَمُ</a:t>
@@ -3824,11 +3844,12 @@
               <a:buNone/>
             </a:pPr>
             <a:r>
-              <a:rPr lang="en-US" sz="950" b="1" dirty="0">
+              <a:rPr lang="ar-SA" sz="950" b="1" dirty="0">
                 <a:solidFill>
                   <a:srgbClr val="FFFFFF"/>
                 </a:solidFill>
                 <a:latin typeface="Calibri" pitchFamily="34" charset="0"/>
+                <a:ea typeface="Amiri" pitchFamily="2" charset="-78"/>
                 <a:cs typeface="Amiri" pitchFamily="2" charset="-78"/>
               </a:rPr>
               <a:t>قَمِيصًا أَبْيَضَ</a:t>
@@ -3889,11 +3910,12 @@
               <a:buNone/>
             </a:pPr>
             <a:r>
-              <a:rPr lang="en-US" sz="950" b="1" dirty="0">
+              <a:rPr lang="ar-SA" sz="950" b="1" dirty="0">
                 <a:solidFill>
                   <a:srgbClr val="FFFFFF"/>
                 </a:solidFill>
                 <a:latin typeface="Calibri" pitchFamily="34" charset="0"/>
+                <a:ea typeface="Amiri" pitchFamily="2" charset="-78"/>
                 <a:cs typeface="Amiri" pitchFamily="2" charset="-78"/>
               </a:rPr>
               <a:t>لٰكِنَّهَا كَانَتْ ضَيِّقَةً</a:t>
@@ -3954,11 +3976,12 @@
               <a:buNone/>
             </a:pPr>
             <a:r>
-              <a:rPr lang="en-US" sz="950" b="1" dirty="0">
+              <a:rPr lang="ar-SA" sz="950" b="1" dirty="0">
                 <a:solidFill>
                   <a:srgbClr val="FFFFFF"/>
                 </a:solidFill>
                 <a:latin typeface="Calibri" pitchFamily="34" charset="0"/>
+                <a:ea typeface="Amiri" pitchFamily="2" charset="-78"/>
                 <a:cs typeface="Amiri" pitchFamily="2" charset="-78"/>
               </a:rPr>
               <a:t>أَغْلَى مِنَ القَمِيصِ</a:t>
@@ -4019,11 +4042,12 @@
               <a:buNone/>
             </a:pPr>
             <a:r>
-              <a:rPr lang="en-US" sz="950" b="1" dirty="0">
+              <a:rPr lang="ar-SA" sz="950" b="1" dirty="0">
                 <a:solidFill>
                   <a:srgbClr val="FFFFFF"/>
                 </a:solidFill>
                 <a:latin typeface="Calibri" pitchFamily="34" charset="0"/>
+                <a:ea typeface="Amiri" pitchFamily="2" charset="-78"/>
                 <a:cs typeface="Amiri" pitchFamily="2" charset="-78"/>
               </a:rPr>
               <a:t>سَأَلْبَسُهَا</a:t>
@@ -4157,6 +4181,7 @@
                   <a:srgbClr val="D4AF37"/>
                 </a:solidFill>
                 <a:latin typeface="Amiri" pitchFamily="2" charset="-78"/>
+                <a:ea typeface="Amiri" pitchFamily="2" charset="-78"/>
                 <a:cs typeface="Amiri" pitchFamily="2" charset="-78"/>
               </a:rPr>
               <a:t>م</a:t>
@@ -4477,6 +4502,7 @@
                   <a:srgbClr val="8A6D1E"/>
                 </a:solidFill>
                 <a:latin typeface="Amiri" pitchFamily="2" charset="-78"/>
+                <a:ea typeface="Amiri" pitchFamily="2" charset="-78"/>
                 <a:cs typeface="Amiri" pitchFamily="2" charset="-78"/>
               </a:rPr>
               <a:t>نَمُوذَجُ الإِجَابَةِ</a:t>
@@ -4590,6 +4616,7 @@
                   <a:srgbClr val="1F2A37"/>
                 </a:solidFill>
                 <a:latin typeface="Amiri" pitchFamily="2" charset="-78"/>
+                <a:ea typeface="Amiri" pitchFamily="2" charset="-78"/>
                 <a:cs typeface="Amiri" pitchFamily="2" charset="-78"/>
               </a:rPr>
               <a:t>عَزِيزِي يُوسُفُ،</a:t>
@@ -4609,6 +4636,7 @@
                   <a:srgbClr val="1F2A37"/>
                 </a:solidFill>
                 <a:latin typeface="Amiri" pitchFamily="2" charset="-78"/>
+                <a:ea typeface="Amiri" pitchFamily="2" charset="-78"/>
                 <a:cs typeface="Amiri" pitchFamily="2" charset="-78"/>
               </a:rPr>
               <a:t>تَحِيَّةً طَيِّبَةً، وَبَعْدُ، فَقَدْ قَضَيْتُ صَبَاحَ أَمْسِ فِي المَرْكَزِ التِّجَارِيِّ أَبْحَثُ عَنْ مَلَابِسَ لِحَفْلَةِ زِفَافِ ابْنِ عَمِّي. اشْتَرَيْتُ قَمِيصًا أَبْيَضَ مِنَ القُطْنِ، وَبِنْطَالًا كُحْلِيًّا أَنِيقًا، وَرَبْطَةَ عُنُقٍ حَمْرَاءَ اخْتَارَتْهَا أُخْتِي. جَرَّبْتُ أَيْضًا سُتْرَةً جِلْدِيَّةً أَعْجَبَتْنِي كَثِيرًا، غَيْرَ أَنَّهَا كَانَتْ أَغْلَى مِنْ كُلِّ المَلَابِسِ الأُخْرَى مَعًا، فَتَرَكْتُهَا. فِي رَأْيِي، المَحَلَّاتُ أَفْضَلُ مِنَ الإِنْتَرْنِتِ، لِأَنَّنِي أَسْتَطِيعُ أَنْ أُجَرِّبَ المَلَابِسَ وَأَلْمِسَ القُمَاشَ قَبْلَ أَنْ أَدْفَعَ. سَأَلْبَسُهَا كُلَّهَا فِي الزِّفَافِ يَوْمَ الجُمُعَةِ، وَسَأَلْتَقِطُ صُوَرًا كَثِيرَةً، وَإِذَا أَعْجَبَتْكَ، فَسَأُرْسِلُ لَكَ اسْمَ المَحَلِّ!</a:t>
@@ -4628,6 +4656,7 @@
                   <a:srgbClr val="1F2A37"/>
                 </a:solidFill>
                 <a:latin typeface="Amiri" pitchFamily="2" charset="-78"/>
+                <a:ea typeface="Amiri" pitchFamily="2" charset="-78"/>
                 <a:cs typeface="Amiri" pitchFamily="2" charset="-78"/>
               </a:rPr>
               <a:t>مَعَ تَحِيَّاتِي،</a:t>
@@ -4647,6 +4676,7 @@
                   <a:srgbClr val="1F2A37"/>
                 </a:solidFill>
                 <a:latin typeface="Amiri" pitchFamily="2" charset="-78"/>
+                <a:ea typeface="Amiri" pitchFamily="2" charset="-78"/>
                 <a:cs typeface="Amiri" pitchFamily="2" charset="-78"/>
               </a:rPr>
               <a:t>آدَمُ</a:t>
@@ -4810,11 +4840,12 @@
               <a:buNone/>
             </a:pPr>
             <a:r>
-              <a:rPr lang="en-US" sz="950" b="1" dirty="0">
+              <a:rPr lang="ar-SA" sz="950" b="1" dirty="0">
                 <a:solidFill>
                   <a:srgbClr val="FFFFFF"/>
                 </a:solidFill>
                 <a:latin typeface="Calibri" pitchFamily="34" charset="0"/>
+                <a:ea typeface="Amiri" pitchFamily="2" charset="-78"/>
                 <a:cs typeface="Amiri" pitchFamily="2" charset="-78"/>
               </a:rPr>
               <a:t>رَبْطَةَ عُنُقٍ حَمْرَاءَ اخْتَارَتْهَا</a:t>
@@ -4875,11 +4906,12 @@
               <a:buNone/>
             </a:pPr>
             <a:r>
-              <a:rPr lang="en-US" sz="950" b="1" dirty="0">
+              <a:rPr lang="ar-SA" sz="950" b="1" dirty="0">
                 <a:solidFill>
                   <a:srgbClr val="FFFFFF"/>
                 </a:solidFill>
                 <a:latin typeface="Calibri" pitchFamily="34" charset="0"/>
+                <a:ea typeface="Amiri" pitchFamily="2" charset="-78"/>
                 <a:cs typeface="Amiri" pitchFamily="2" charset="-78"/>
               </a:rPr>
               <a:t>أَغْلَى مِنْ كُلِّ المَلَابِسِ</a:t>
@@ -4940,11 +4972,12 @@
               <a:buNone/>
             </a:pPr>
             <a:r>
-              <a:rPr lang="en-US" sz="950" b="1" dirty="0">
+              <a:rPr lang="ar-SA" sz="950" b="1" dirty="0">
                 <a:solidFill>
                   <a:srgbClr val="FFFFFF"/>
                 </a:solidFill>
                 <a:latin typeface="Calibri" pitchFamily="34" charset="0"/>
+                <a:ea typeface="Amiri" pitchFamily="2" charset="-78"/>
                 <a:cs typeface="Amiri" pitchFamily="2" charset="-78"/>
               </a:rPr>
               <a:t>قَبْلَ أَنْ أَدْفَعَ</a:t>
@@ -5005,11 +5038,12 @@
               <a:buNone/>
             </a:pPr>
             <a:r>
-              <a:rPr lang="en-US" sz="950" b="1" dirty="0">
+              <a:rPr lang="ar-SA" sz="950" b="1" dirty="0">
                 <a:solidFill>
                   <a:srgbClr val="FFFFFF"/>
                 </a:solidFill>
                 <a:latin typeface="Calibri" pitchFamily="34" charset="0"/>
+                <a:ea typeface="Amiri" pitchFamily="2" charset="-78"/>
                 <a:cs typeface="Amiri" pitchFamily="2" charset="-78"/>
               </a:rPr>
               <a:t>إِذَا أَعْجَبَتْكَ، فَسَأُرْسِلُ</a:t>
@@ -5143,6 +5177,7 @@
                   <a:srgbClr val="D4AF37"/>
                 </a:solidFill>
                 <a:latin typeface="Amiri" pitchFamily="2" charset="-78"/>
+                <a:ea typeface="Amiri" pitchFamily="2" charset="-78"/>
                 <a:cs typeface="Amiri" pitchFamily="2" charset="-78"/>
               </a:rPr>
               <a:t>م</a:t>
@@ -5463,6 +5498,7 @@
                   <a:srgbClr val="8A6D1E"/>
                 </a:solidFill>
                 <a:latin typeface="Amiri" pitchFamily="2" charset="-78"/>
+                <a:ea typeface="Amiri" pitchFamily="2" charset="-78"/>
                 <a:cs typeface="Amiri" pitchFamily="2" charset="-78"/>
               </a:rPr>
               <a:t>اخْتَرْ عُنْوَانًا وَاحِدًا</a:t>
@@ -5743,6 +5779,7 @@
                   <a:srgbClr val="1B3B6F"/>
                 </a:solidFill>
                 <a:latin typeface="Amiri" pitchFamily="2" charset="-78"/>
+                <a:ea typeface="Amiri" pitchFamily="2" charset="-78"/>
                 <a:cs typeface="Amiri" pitchFamily="2" charset="-78"/>
               </a:rPr>
               <a:t>مَلَابِسِي وَالتَّسَوُّقُ</a:t>
@@ -5781,6 +5818,7 @@
                   <a:srgbClr val="1B3B6F"/>
                 </a:solidFill>
                 <a:latin typeface="Amiri" pitchFamily="2" charset="-78"/>
+                <a:ea typeface="Amiri" pitchFamily="2" charset="-78"/>
                 <a:cs typeface="Amiri" pitchFamily="2" charset="-78"/>
               </a:rPr>
               <a:t>(أ)</a:t>
@@ -5887,6 +5925,7 @@
                   <a:srgbClr val="1B3B6F"/>
                 </a:solidFill>
                 <a:latin typeface="Amiri" pitchFamily="2" charset="-78"/>
+                <a:ea typeface="Amiri" pitchFamily="2" charset="-78"/>
                 <a:cs typeface="Amiri" pitchFamily="2" charset="-78"/>
               </a:rPr>
               <a:t>مَاذَا تَلْبَسُ عَادَةً؟ · أَيْنَ وَكَيْفَ تَتَسَوَّقُ؟ · تَجْرِبَةُ شِرَاءٍ لَا تَنْسَاهَا · رَأْيُكَ وَعَادَاتُكَ فِي المُسْتَقْبَلِ</a:t>
@@ -6018,6 +6057,7 @@
                   <a:srgbClr val="1B3B6F"/>
                 </a:solidFill>
                 <a:latin typeface="Amiri" pitchFamily="2" charset="-78"/>
+                <a:ea typeface="Amiri" pitchFamily="2" charset="-78"/>
                 <a:cs typeface="Amiri" pitchFamily="2" charset="-78"/>
               </a:rPr>
               <a:t>المُوضَةُ السَّرِيعَةُ: مَنْ يَدْفَعُ الثَّمَنَ؟</a:t>
@@ -6056,6 +6096,7 @@
                   <a:srgbClr val="1B3B6F"/>
                 </a:solidFill>
                 <a:latin typeface="Amiri" pitchFamily="2" charset="-78"/>
+                <a:ea typeface="Amiri" pitchFamily="2" charset="-78"/>
                 <a:cs typeface="Amiri" pitchFamily="2" charset="-78"/>
               </a:rPr>
               <a:t>(ب)</a:t>
@@ -6162,6 +6203,7 @@
                   <a:srgbClr val="1B3B6F"/>
                 </a:solidFill>
                 <a:latin typeface="Amiri" pitchFamily="2" charset="-78"/>
+                <a:ea typeface="Amiri" pitchFamily="2" charset="-78"/>
                 <a:cs typeface="Amiri" pitchFamily="2" charset="-78"/>
               </a:rPr>
               <a:t>لِمَاذَا أَصْبَحَتِ المَلَابِسُ رَخِيصَةً؟ · المَاضِي وَالحَاضِرُ · مُبَادَرَةٌ أَوْ تَجْرِبَةٌ · رَأْيُكَ وَاقْتِرَاحُكَ</a:t>
@@ -6361,6 +6403,7 @@
                   <a:srgbClr val="D4AF37"/>
                 </a:solidFill>
                 <a:latin typeface="Amiri" pitchFamily="2" charset="-78"/>
+                <a:ea typeface="Amiri" pitchFamily="2" charset="-78"/>
                 <a:cs typeface="Amiri" pitchFamily="2" charset="-78"/>
               </a:rPr>
               <a:t>م</a:t>
@@ -6681,6 +6724,7 @@
                   <a:srgbClr val="8A6D1E"/>
                 </a:solidFill>
                 <a:latin typeface="Amiri" pitchFamily="2" charset="-78"/>
+                <a:ea typeface="Amiri" pitchFamily="2" charset="-78"/>
                 <a:cs typeface="Amiri" pitchFamily="2" charset="-78"/>
               </a:rPr>
               <a:t>خُطَّةُ الكِتَابَةِ</a:t>
@@ -7305,6 +7349,7 @@
                   <a:srgbClr val="1B3B6F"/>
                 </a:solidFill>
                 <a:latin typeface="Amiri" pitchFamily="2" charset="-78"/>
+                <a:ea typeface="Amiri" pitchFamily="2" charset="-78"/>
                 <a:cs typeface="Amiri" pitchFamily="2" charset="-78"/>
               </a:rPr>
               <a:t>السُّوقُ أَرْخَصُ مِنَ المَرْكَزِ التِّجَارِيِّ.</a:t>
@@ -7404,6 +7449,7 @@
                   <a:srgbClr val="1B3B6F"/>
                 </a:solidFill>
                 <a:latin typeface="Amiri" pitchFamily="2" charset="-78"/>
+                <a:ea typeface="Amiri" pitchFamily="2" charset="-78"/>
                 <a:cs typeface="Amiri" pitchFamily="2" charset="-78"/>
               </a:rPr>
               <a:t>جَرَّبْتُ ثَلَاثَةَ مَعَاطِفَ، وَاخْتَرْتُ الأَسْوَدَ.</a:t>
@@ -7503,6 +7549,7 @@
                   <a:srgbClr val="1B3B6F"/>
                 </a:solidFill>
                 <a:latin typeface="Amiri" pitchFamily="2" charset="-78"/>
+                <a:ea typeface="Amiri" pitchFamily="2" charset="-78"/>
                 <a:cs typeface="Amiri" pitchFamily="2" charset="-78"/>
               </a:rPr>
               <a:t>سَأَشْتَرِي مَلَابِسَ أَقَلَّ وَأَفْضَلَ.</a:t>
@@ -7664,6 +7711,7 @@
                   <a:srgbClr val="1F2A37"/>
                 </a:solidFill>
                 <a:latin typeface="Amiri" pitchFamily="2" charset="-78"/>
+                <a:ea typeface="Amiri" pitchFamily="2" charset="-78"/>
                 <a:cs typeface="Amiri" pitchFamily="2" charset="-78"/>
               </a:rPr>
               <a:t>أ</a:t>
@@ -7690,6 +7738,7 @@
                   <a:srgbClr val="1F2A37"/>
                 </a:solidFill>
                 <a:latin typeface="Amiri" pitchFamily="2" charset="-78"/>
+                <a:ea typeface="Amiri" pitchFamily="2" charset="-78"/>
                 <a:cs typeface="Amiri" pitchFamily="2" charset="-78"/>
               </a:rPr>
               <a:t>ب</a:t>
@@ -7836,6 +7885,7 @@
                   <a:srgbClr val="D4AF37"/>
                 </a:solidFill>
                 <a:latin typeface="Amiri" pitchFamily="2" charset="-78"/>
+                <a:ea typeface="Amiri" pitchFamily="2" charset="-78"/>
                 <a:cs typeface="Amiri" pitchFamily="2" charset="-78"/>
               </a:rPr>
               <a:t>م</a:t>
@@ -8093,6 +8143,7 @@
                   <a:srgbClr val="8A6D1E"/>
                 </a:solidFill>
                 <a:latin typeface="Amiri" pitchFamily="2" charset="-78"/>
+                <a:ea typeface="Amiri" pitchFamily="2" charset="-78"/>
                 <a:cs typeface="Amiri" pitchFamily="2" charset="-78"/>
               </a:rPr>
               <a:t>أ</a:t>
@@ -8157,6 +8208,7 @@
                   <a:srgbClr val="1B3B6F"/>
                 </a:solidFill>
                 <a:latin typeface="Amiri" pitchFamily="2" charset="-78"/>
+                <a:ea typeface="Amiri" pitchFamily="2" charset="-78"/>
                 <a:cs typeface="Amiri" pitchFamily="2" charset="-78"/>
               </a:rPr>
               <a:t>أ</a:t>
@@ -8208,6 +8260,7 @@
                   <a:srgbClr val="8A6D1E"/>
                 </a:solidFill>
                 <a:latin typeface="Amiri" pitchFamily="2" charset="-78"/>
+                <a:ea typeface="Amiri" pitchFamily="2" charset="-78"/>
                 <a:cs typeface="Amiri" pitchFamily="2" charset="-78"/>
               </a:rPr>
               <a:t>نَمُوذَجُ الإِجَابَةِ</a:t>
@@ -8321,6 +8374,7 @@
                   <a:srgbClr val="1F2A37"/>
                 </a:solidFill>
                 <a:latin typeface="Amiri" pitchFamily="2" charset="-78"/>
+                <a:ea typeface="Amiri" pitchFamily="2" charset="-78"/>
                 <a:cs typeface="Amiri" pitchFamily="2" charset="-78"/>
               </a:rPr>
               <a:t>أُحِبُّ المَلَابِسَ المُرِيحَةَ. فِي البَيْتِ أَلْبَسُ قَمِيصًا رِيَاضِيًّا وَبِنْطَالًا وَاسِعًا. فِي المَدْرَسَةِ أَلْبَسُ الزِّيَّ المَدْرَسِيَّ: قَمِيصًا أَبْيَضَ، وَبِنْطَالًا رَمَادِيًّا، وَسُتْرَةً زَرْقَاءَ. لَا أُحِبُّ الزِّيَّ كَثِيرًا، لِأَنَّهُ لَيْسَ مُرِيحًا، وَلِأَنَّ لَوْنَهُ مُمِلٌّ.</a:t>
@@ -8340,6 +8394,7 @@
                   <a:srgbClr val="1F2A37"/>
                 </a:solidFill>
                 <a:latin typeface="Amiri" pitchFamily="2" charset="-78"/>
+                <a:ea typeface="Amiri" pitchFamily="2" charset="-78"/>
                 <a:cs typeface="Amiri" pitchFamily="2" charset="-78"/>
               </a:rPr>
               <a:t>أَذْهَبُ لِلتَّسَوُّقِ مَرَّةً فِي الشَّهْرِ مَعَ أُمِّي. نَذْهَبُ إِلَى المَرْكَزِ التِّجَارِيِّ فِي وَسَطِ المَدِينَةِ. المَحَلَّاتُ هُنَاكَ كَثِيرَةٌ، لٰكِنَّهَا غَالِيَةٌ. السُّوقُ الشَّعْبِيُّ أَرْخَصُ مِنَ المَرْكَزِ التِّجَارِيِّ، وَفِيهِ مَلَابِسُ جَمِيلَةٌ أَيْضًا. أُحِبُّ السُّوقَ، لِأَنَّهُ مُزْدَحِمٌ وَمُمْتِعٌ، وَفِيهِ مَطَاعِمُ صَغِيرَةٌ.</a:t>
@@ -8359,6 +8414,7 @@
                   <a:srgbClr val="1F2A37"/>
                 </a:solidFill>
                 <a:latin typeface="Amiri" pitchFamily="2" charset="-78"/>
+                <a:ea typeface="Amiri" pitchFamily="2" charset="-78"/>
                 <a:cs typeface="Amiri" pitchFamily="2" charset="-78"/>
               </a:rPr>
               <a:t>فِي الشَّهْرِ المَاضِي اشْتَرَيْتُ مِعْطَفًا جَدِيدًا لِلشِّتَاءِ. جَرَّبْتُ ثَلَاثَةَ مَعَاطِفَ، وَاخْتَرْتُ مِعْطَفًا أَسْوَدَ طَوِيلًا. كَانَ بِسِتِّينَ جُنَيْهًا. أُحِبُّهُ كَثِيرًا، لِأَنَّهُ دَافِئٌ وَجَمِيلٌ، وَأَلْبَسُهُ كُلَّ يَوْمٍ إِلَى المَدْرَسَةِ.</a:t>
@@ -8378,6 +8434,7 @@
                   <a:srgbClr val="1F2A37"/>
                 </a:solidFill>
                 <a:latin typeface="Amiri" pitchFamily="2" charset="-78"/>
+                <a:ea typeface="Amiri" pitchFamily="2" charset="-78"/>
                 <a:cs typeface="Amiri" pitchFamily="2" charset="-78"/>
               </a:rPr>
               <a:t>فِي رَأْيِي، لَا يَجِبُ أَنْ نَشْتَرِيَ مَلَابِسَ كَثِيرَةً. فِي المُسْتَقْبَلِ سَأَشْتَرِي مَلَابِسَ أَقَلَّ، لٰكِنْ أَفْضَلَ، وَسَأُعْطِي مَلَابِسِيَ القَدِيمَةَ لِلْفُقَرَاءِ.</a:t>
@@ -8541,11 +8598,12 @@
               <a:buNone/>
             </a:pPr>
             <a:r>
-              <a:rPr lang="en-US" sz="950" b="1" dirty="0">
+              <a:rPr lang="ar-SA" sz="950" b="1" dirty="0">
                 <a:solidFill>
                   <a:srgbClr val="FFFFFF"/>
                 </a:solidFill>
                 <a:latin typeface="Calibri" pitchFamily="34" charset="0"/>
+                <a:ea typeface="Amiri" pitchFamily="2" charset="-78"/>
                 <a:cs typeface="Amiri" pitchFamily="2" charset="-78"/>
               </a:rPr>
               <a:t>سُتْرَةً زَرْقَاءَ</a:t>
@@ -8606,11 +8664,12 @@
               <a:buNone/>
             </a:pPr>
             <a:r>
-              <a:rPr lang="en-US" sz="950" b="1" dirty="0">
+              <a:rPr lang="ar-SA" sz="950" b="1" dirty="0">
                 <a:solidFill>
                   <a:srgbClr val="FFFFFF"/>
                 </a:solidFill>
                 <a:latin typeface="Calibri" pitchFamily="34" charset="0"/>
+                <a:ea typeface="Amiri" pitchFamily="2" charset="-78"/>
                 <a:cs typeface="Amiri" pitchFamily="2" charset="-78"/>
               </a:rPr>
               <a:t>أَرْخَصُ مِنَ المَرْكَزِ</a:t>
@@ -8671,11 +8730,12 @@
               <a:buNone/>
             </a:pPr>
             <a:r>
-              <a:rPr lang="en-US" sz="950" b="1" dirty="0">
+              <a:rPr lang="ar-SA" sz="950" b="1" dirty="0">
                 <a:solidFill>
                   <a:srgbClr val="FFFFFF"/>
                 </a:solidFill>
                 <a:latin typeface="Calibri" pitchFamily="34" charset="0"/>
+                <a:ea typeface="Amiri" pitchFamily="2" charset="-78"/>
                 <a:cs typeface="Amiri" pitchFamily="2" charset="-78"/>
               </a:rPr>
               <a:t>جَرَّبْتُ ثَلَاثَةَ مَعَاطِفَ</a:t>
@@ -8736,11 +8796,12 @@
               <a:buNone/>
             </a:pPr>
             <a:r>
-              <a:rPr lang="en-US" sz="950" b="1" dirty="0">
+              <a:rPr lang="ar-SA" sz="950" b="1" dirty="0">
                 <a:solidFill>
                   <a:srgbClr val="FFFFFF"/>
                 </a:solidFill>
                 <a:latin typeface="Calibri" pitchFamily="34" charset="0"/>
+                <a:ea typeface="Amiri" pitchFamily="2" charset="-78"/>
                 <a:cs typeface="Amiri" pitchFamily="2" charset="-78"/>
               </a:rPr>
               <a:t>سَأُعْطِي</a:t>
@@ -8874,6 +8935,7 @@
                   <a:srgbClr val="D4AF37"/>
                 </a:solidFill>
                 <a:latin typeface="Amiri" pitchFamily="2" charset="-78"/>
+                <a:ea typeface="Amiri" pitchFamily="2" charset="-78"/>
                 <a:cs typeface="Amiri" pitchFamily="2" charset="-78"/>
               </a:rPr>
               <a:t>م</a:t>
@@ -9131,6 +9193,7 @@
                   <a:srgbClr val="8A6D1E"/>
                 </a:solidFill>
                 <a:latin typeface="Amiri" pitchFamily="2" charset="-78"/>
+                <a:ea typeface="Amiri" pitchFamily="2" charset="-78"/>
                 <a:cs typeface="Amiri" pitchFamily="2" charset="-78"/>
               </a:rPr>
               <a:t>أ</a:t>
@@ -9195,6 +9258,7 @@
                   <a:srgbClr val="1B3B6F"/>
                 </a:solidFill>
                 <a:latin typeface="Amiri" pitchFamily="2" charset="-78"/>
+                <a:ea typeface="Amiri" pitchFamily="2" charset="-78"/>
                 <a:cs typeface="Amiri" pitchFamily="2" charset="-78"/>
               </a:rPr>
               <a:t>أ</a:t>
@@ -9246,6 +9310,7 @@
                   <a:srgbClr val="8A6D1E"/>
                 </a:solidFill>
                 <a:latin typeface="Amiri" pitchFamily="2" charset="-78"/>
+                <a:ea typeface="Amiri" pitchFamily="2" charset="-78"/>
                 <a:cs typeface="Amiri" pitchFamily="2" charset="-78"/>
               </a:rPr>
               <a:t>نَمُوذَجُ الإِجَابَةِ</a:t>
@@ -9359,6 +9424,7 @@
                   <a:srgbClr val="1F2A37"/>
                 </a:solidFill>
                 <a:latin typeface="Amiri" pitchFamily="2" charset="-78"/>
+                <a:ea typeface="Amiri" pitchFamily="2" charset="-78"/>
                 <a:cs typeface="Amiri" pitchFamily="2" charset="-78"/>
               </a:rPr>
               <a:t>لَمْ أَكُنْ أَهْتَمُّ بِالمَلَابِسِ عِنْدَمَا كُنْتُ صَغِيرًا؛ فَقَدْ كَانَتْ أُمِّي تَخْتَارُ لِي كُلَّ شَيْءٍ، وَكُنْتُ أَلْبَسُ مَا تَشْتَرِيهِ دُونَ أَنْ أَعْتَرِضَ. أَمَّا الآنَ فَأَصْبَحَ لِي ذَوْقٌ خَاصٌّ: أُفَضِّلُ الأَلْوَانَ الهَادِئَةَ كَالأَزْرَقِ الغَامِقِ وَالرَّمَادِيِّ وَالأَخْضَرِ الزَّيْتُونِيِّ، وَالمَلَابِسَ القُطْنِيَّةَ المُرِيحَةَ.</a:t>
@@ -9378,6 +9444,7 @@
                   <a:srgbClr val="1F2A37"/>
                 </a:solidFill>
                 <a:latin typeface="Amiri" pitchFamily="2" charset="-78"/>
+                <a:ea typeface="Amiri" pitchFamily="2" charset="-78"/>
                 <a:cs typeface="Amiri" pitchFamily="2" charset="-78"/>
               </a:rPr>
               <a:t>أَذْهَبُ لِلتَّسَوُّقِ مَرَّةً كُلَّ شَهْرَيْنِ تَقْرِيبًا، وَأُفَضِّلُ المَحَلَّاتِ عَلَى الإِنْتَرْنِتِ، لِأَنِّي أُحِبُّ أَنْ أُجَرِّبَ القِطْعَةَ قَبْلَ أَنْ أَشْتَرِيَهَا. وَصَحِيحٌ أَنَّ المَرْكَزَ التِّجَارِيَّ أَغْلَى مِنَ السُّوقِ الشَّعْبِيِّ، غَيْرَ أَنَّ الجَوْدَةَ فِيهِ أَفْضَلُ عَادَةً.</a:t>
@@ -9397,6 +9464,7 @@
                   <a:srgbClr val="1F2A37"/>
                 </a:solidFill>
                 <a:latin typeface="Amiri" pitchFamily="2" charset="-78"/>
+                <a:ea typeface="Amiri" pitchFamily="2" charset="-78"/>
                 <a:cs typeface="Amiri" pitchFamily="2" charset="-78"/>
               </a:rPr>
               <a:t>فِي الشِّتَاءِ المَاضِي تَعَلَّمْتُ دَرْسًا مُهِمًّا؛ اشْتَرَيْتُ مِنَ الإِنْتَرْنِتِ سُتْرَةً بَدَتْ رَائِعَةً فِي الصُّورَةِ، فَلَمَّا وَصَلَتْ وَجَدْتُهَا رَقِيقَةً وَلَوْنُهَا مُخْتَلِفٌ تَمَامًا، وَلَمْ أَسْتَطِعْ أَنْ أُرْجِعَهَا. مُنْذُ ذٰلِكَ اليَوْمِ لَا أَشْتَرِي شَيْئًا قَبْلَ أَنْ أَقْرَأَ آرَاءَ المُشْتَرِينَ وَأَتَأَكَّدَ مِنَ المَقَاسِ.</a:t>
@@ -9416,6 +9484,7 @@
                   <a:srgbClr val="1F2A37"/>
                 </a:solidFill>
                 <a:latin typeface="Amiri" pitchFamily="2" charset="-78"/>
+                <a:ea typeface="Amiri" pitchFamily="2" charset="-78"/>
                 <a:cs typeface="Amiri" pitchFamily="2" charset="-78"/>
               </a:rPr>
               <a:t>فِي المُسْتَقْبَلِ سَأَشْتَرِي مَلَابِسَ أَقَلَّ وَأَجْوَدَ، وَلَوْ كَانَ عِنْدِي وَقْتٌ أَكْثَرُ، لَتَعَلَّمْتُ الخِيَاطَةَ مِنْ جَدَّتِي، لِأُصْلِحَ مَلَابِسِي بِنَفْسِي بَدَلًا مِنْ أَنْ أَرْمِيَهَا.</a:t>
@@ -9514,11 +9583,12 @@
               <a:buNone/>
             </a:pPr>
             <a:r>
-              <a:rPr lang="en-US" sz="950" b="1" dirty="0">
+              <a:rPr lang="ar-SA" sz="950" b="1" dirty="0">
                 <a:solidFill>
                   <a:srgbClr val="FFFFFF"/>
                 </a:solidFill>
                 <a:latin typeface="Calibri" pitchFamily="34" charset="0"/>
+                <a:ea typeface="Amiri" pitchFamily="2" charset="-78"/>
                 <a:cs typeface="Amiri" pitchFamily="2" charset="-78"/>
               </a:rPr>
               <a:t>لَمْ أَكُنْ أَهْتَمُّ</a:t>
@@ -9579,11 +9649,12 @@
               <a:buNone/>
             </a:pPr>
             <a:r>
-              <a:rPr lang="en-US" sz="950" b="1" dirty="0">
+              <a:rPr lang="ar-SA" sz="950" b="1" dirty="0">
                 <a:solidFill>
                   <a:srgbClr val="FFFFFF"/>
                 </a:solidFill>
                 <a:latin typeface="Calibri" pitchFamily="34" charset="0"/>
+                <a:ea typeface="Amiri" pitchFamily="2" charset="-78"/>
                 <a:cs typeface="Amiri" pitchFamily="2" charset="-78"/>
               </a:rPr>
               <a:t>أُفَضِّلُ المَحَلَّاتِ عَلَى</a:t>
@@ -9644,11 +9715,12 @@
               <a:buNone/>
             </a:pPr>
             <a:r>
-              <a:rPr lang="en-US" sz="950" b="1" dirty="0">
+              <a:rPr lang="ar-SA" sz="950" b="1" dirty="0">
                 <a:solidFill>
                   <a:srgbClr val="FFFFFF"/>
                 </a:solidFill>
                 <a:latin typeface="Calibri" pitchFamily="34" charset="0"/>
+                <a:ea typeface="Amiri" pitchFamily="2" charset="-78"/>
                 <a:cs typeface="Amiri" pitchFamily="2" charset="-78"/>
               </a:rPr>
               <a:t>فَلَمَّا وَصَلَتْ وَجَدْتُهَا</a:t>
@@ -9709,11 +9781,12 @@
               <a:buNone/>
             </a:pPr>
             <a:r>
-              <a:rPr lang="en-US" sz="950" b="1" dirty="0">
+              <a:rPr lang="ar-SA" sz="950" b="1" dirty="0">
                 <a:solidFill>
                   <a:srgbClr val="FFFFFF"/>
                 </a:solidFill>
                 <a:latin typeface="Calibri" pitchFamily="34" charset="0"/>
+                <a:ea typeface="Amiri" pitchFamily="2" charset="-78"/>
                 <a:cs typeface="Amiri" pitchFamily="2" charset="-78"/>
               </a:rPr>
               <a:t>لَوْ كَانَ … لَتَعَلَّمْتُ</a:t>
@@ -9847,6 +9920,7 @@
                   <a:srgbClr val="D4AF37"/>
                 </a:solidFill>
                 <a:latin typeface="Amiri" pitchFamily="2" charset="-78"/>
+                <a:ea typeface="Amiri" pitchFamily="2" charset="-78"/>
                 <a:cs typeface="Amiri" pitchFamily="2" charset="-78"/>
               </a:rPr>
               <a:t>م</a:t>
@@ -10104,6 +10178,7 @@
                   <a:srgbClr val="8A6D1E"/>
                 </a:solidFill>
                 <a:latin typeface="Amiri" pitchFamily="2" charset="-78"/>
+                <a:ea typeface="Amiri" pitchFamily="2" charset="-78"/>
                 <a:cs typeface="Amiri" pitchFamily="2" charset="-78"/>
               </a:rPr>
               <a:t>ب</a:t>
@@ -10168,6 +10243,7 @@
                   <a:srgbClr val="1B3B6F"/>
                 </a:solidFill>
                 <a:latin typeface="Amiri" pitchFamily="2" charset="-78"/>
+                <a:ea typeface="Amiri" pitchFamily="2" charset="-78"/>
                 <a:cs typeface="Amiri" pitchFamily="2" charset="-78"/>
               </a:rPr>
               <a:t>ب</a:t>
@@ -10219,6 +10295,7 @@
                   <a:srgbClr val="8A6D1E"/>
                 </a:solidFill>
                 <a:latin typeface="Amiri" pitchFamily="2" charset="-78"/>
+                <a:ea typeface="Amiri" pitchFamily="2" charset="-78"/>
                 <a:cs typeface="Amiri" pitchFamily="2" charset="-78"/>
               </a:rPr>
               <a:t>نَمُوذَجُ الإِجَابَةِ</a:t>
@@ -10332,6 +10409,7 @@
                   <a:srgbClr val="1F2A37"/>
                 </a:solidFill>
                 <a:latin typeface="Amiri" pitchFamily="2" charset="-78"/>
+                <a:ea typeface="Amiri" pitchFamily="2" charset="-78"/>
                 <a:cs typeface="Amiri" pitchFamily="2" charset="-78"/>
               </a:rPr>
               <a:t>أَصْبَحَتِ المَلَابِسُ اليَوْمَ أَرْخَصَ مِنْ أَيِّ وَقْتٍ مَضَى، فَيُمْكِنُ أَنْ تَشْتَرِيَ قَمِيصًا بِثَمَنِ فِنْجَانِ قَهْوَةٍ. وَتَعْرِضُ المَحَلَّاتُ مُوضَةً جَدِيدَةً كُلَّ أُسْبُوعٍ، فَيَشْعُرُ الشَّبَابُ بِأَنَّ مَلَابِسَهُمْ أَصْبَحَتْ قَدِيمَةً بَعْدَ أَشْهُرٍ قَلِيلَةٍ، حَتَّى لَوْ كَانَتْ فِي حَالَةٍ مُمْتَازَةٍ.</a:t>
@@ -10351,6 +10429,7 @@
                   <a:srgbClr val="1F2A37"/>
                 </a:solidFill>
                 <a:latin typeface="Amiri" pitchFamily="2" charset="-78"/>
+                <a:ea typeface="Amiri" pitchFamily="2" charset="-78"/>
                 <a:cs typeface="Amiri" pitchFamily="2" charset="-78"/>
               </a:rPr>
               <a:t>فِي المَاضِي كَانَتِ الأُسَرُ تَشْتَرِي مَلَابِسَ جَدِيدَةً فِي الأَعْيَادِ فَقَطْ، وَكَانَتِ الأُمَّهَاتُ يُصْلِحْنَ المَلَابِسَ المُمَزَّقَةَ، وَيُعْطِينَهَا لِلْأَطْفَالِ الأَصْغَرِ، أَمَّا اليَوْمَ فَنَرْمِي المَلَابِسَ بِسُهُولَةٍ، مِمَّا يَمْلَأُ مَكَبَّاتِ النُّفَايَاتِ وَيُلَوِّثُ المِيَاهَ.</a:t>
@@ -10370,6 +10449,7 @@
                   <a:srgbClr val="1F2A37"/>
                 </a:solidFill>
                 <a:latin typeface="Amiri" pitchFamily="2" charset="-78"/>
+                <a:ea typeface="Amiri" pitchFamily="2" charset="-78"/>
                 <a:cs typeface="Amiri" pitchFamily="2" charset="-78"/>
               </a:rPr>
               <a:t>فِي السَّنَةِ المَاضِيَةِ نَظَّمَ صَفِّي «سُوقَ تَبَادُلٍ»؛ أَحْضَرَ كُلُّ طَالِبٍ مَلَابِسَ لَا يَلْبَسُهَا، وَأَخَذَ مَكَانَهَا مَلَابِسَ أُخْرَى مَجَّانًا. شَارَكَ أَكْثَرُ مِنْ مِئَةِ طَالِبٍ، وَتَبَادَلْنَا مِئَاتِ القِطَعِ بَدَلًا مِنْ أَنْ نَرْمِيَهَا، ثُمَّ أَعْطَيْنَا مَا بَقِيَ لِجَمْعِيَّةٍ خَيْرِيَّةٍ.</a:t>
@@ -10389,6 +10469,7 @@
                   <a:srgbClr val="1F2A37"/>
                 </a:solidFill>
                 <a:latin typeface="Amiri" pitchFamily="2" charset="-78"/>
+                <a:ea typeface="Amiri" pitchFamily="2" charset="-78"/>
                 <a:cs typeface="Amiri" pitchFamily="2" charset="-78"/>
               </a:rPr>
               <a:t>صَحِيحٌ أَنَّ المُوضَةَ السَّرِيعَةَ تُتِيحُ لِلْجَمِيعِ أَنْ يَلْبَسُوا مَلَابِسَ جَدِيدَةً، غَيْرَ أَنَّ ثَمَنَهَا الحَقِيقِيَّ تَدْفَعُهُ البِيئَةُ. وَلَوِ اشْتَرَى كُلُّ وَاحِدٍ مِنَّا قِطْعَةً وَاحِدَةً جَيِّدَةً بَدَلًا مِنْ ثَلَاثٍ رَخِيصَةٍ، لَقَلَّتِ النُّفَايَاتُ كَثِيرًا.</a:t>
@@ -10487,11 +10568,12 @@
               <a:buNone/>
             </a:pPr>
             <a:r>
-              <a:rPr lang="en-US" sz="950" b="1" dirty="0">
+              <a:rPr lang="ar-SA" sz="950" b="1" dirty="0">
                 <a:solidFill>
                   <a:srgbClr val="FFFFFF"/>
                 </a:solidFill>
                 <a:latin typeface="Calibri" pitchFamily="34" charset="0"/>
+                <a:ea typeface="Amiri" pitchFamily="2" charset="-78"/>
                 <a:cs typeface="Amiri" pitchFamily="2" charset="-78"/>
               </a:rPr>
               <a:t>أَرْخَصَ مِنْ أَيِّ وَقْتٍ مَضَى</a:t>
@@ -10552,11 +10634,12 @@
               <a:buNone/>
             </a:pPr>
             <a:r>
-              <a:rPr lang="en-US" sz="950" b="1" dirty="0">
+              <a:rPr lang="ar-SA" sz="950" b="1" dirty="0">
                 <a:solidFill>
                   <a:srgbClr val="FFFFFF"/>
                 </a:solidFill>
                 <a:latin typeface="Calibri" pitchFamily="34" charset="0"/>
+                <a:ea typeface="Amiri" pitchFamily="2" charset="-78"/>
                 <a:cs typeface="Amiri" pitchFamily="2" charset="-78"/>
               </a:rPr>
               <a:t>كَانَتِ الأُمَّهَاتُ يُصْلِحْنَ</a:t>
@@ -10617,11 +10700,12 @@
               <a:buNone/>
             </a:pPr>
             <a:r>
-              <a:rPr lang="en-US" sz="950" b="1" dirty="0">
+              <a:rPr lang="ar-SA" sz="950" b="1" dirty="0">
                 <a:solidFill>
                   <a:srgbClr val="FFFFFF"/>
                 </a:solidFill>
                 <a:latin typeface="Calibri" pitchFamily="34" charset="0"/>
+                <a:ea typeface="Amiri" pitchFamily="2" charset="-78"/>
                 <a:cs typeface="Amiri" pitchFamily="2" charset="-78"/>
               </a:rPr>
               <a:t>مِمَّا يَمْلَأُ</a:t>
@@ -10682,11 +10766,12 @@
               <a:buNone/>
             </a:pPr>
             <a:r>
-              <a:rPr lang="en-US" sz="950" b="1" dirty="0">
+              <a:rPr lang="ar-SA" sz="950" b="1" dirty="0">
                 <a:solidFill>
                   <a:srgbClr val="FFFFFF"/>
                 </a:solidFill>
                 <a:latin typeface="Calibri" pitchFamily="34" charset="0"/>
+                <a:ea typeface="Amiri" pitchFamily="2" charset="-78"/>
                 <a:cs typeface="Amiri" pitchFamily="2" charset="-78"/>
               </a:rPr>
               <a:t>لَوِ اشْتَرَى … لَقَلَّتِ</a:t>
@@ -10820,6 +10905,7 @@
                   <a:srgbClr val="D4AF37"/>
                 </a:solidFill>
                 <a:latin typeface="Amiri" pitchFamily="2" charset="-78"/>
+                <a:ea typeface="Amiri" pitchFamily="2" charset="-78"/>
                 <a:cs typeface="Amiri" pitchFamily="2" charset="-78"/>
               </a:rPr>
               <a:t>م</a:t>
@@ -11140,6 +11226,7 @@
                   <a:srgbClr val="8A6D1E"/>
                 </a:solidFill>
                 <a:latin typeface="Amiri" pitchFamily="2" charset="-78"/>
+                <a:ea typeface="Amiri" pitchFamily="2" charset="-78"/>
                 <a:cs typeface="Amiri" pitchFamily="2" charset="-78"/>
               </a:rPr>
               <a:t>قَيِّمْ عَمَلَكَ</a:t>
@@ -12384,6 +12471,7 @@
                   <a:srgbClr val="FFFFFF"/>
                 </a:solidFill>
                 <a:latin typeface="Amiri" pitchFamily="2" charset="-78"/>
+                <a:ea typeface="Amiri" pitchFamily="2" charset="-78"/>
                 <a:cs typeface="Amiri" pitchFamily="2" charset="-78"/>
               </a:rPr>
               <a:t>أَحْسَنْتُمْ! إِلَى اللِّقَاءِ</a:t>
@@ -12536,6 +12624,7 @@
                   <a:srgbClr val="D4AF37"/>
                 </a:solidFill>
                 <a:latin typeface="Amiri" pitchFamily="2" charset="-78"/>
+                <a:ea typeface="Amiri" pitchFamily="2" charset="-78"/>
                 <a:cs typeface="Amiri" pitchFamily="2" charset="-78"/>
               </a:rPr>
               <a:t>وَرْشَةُ التَّدْرِيبِ</a:t>
@@ -12669,6 +12758,7 @@
                   <a:srgbClr val="D4AF37"/>
                 </a:solidFill>
                 <a:latin typeface="Amiri" pitchFamily="2" charset="-78"/>
+                <a:ea typeface="Amiri" pitchFamily="2" charset="-78"/>
                 <a:cs typeface="Amiri" pitchFamily="2" charset="-78"/>
               </a:rPr>
               <a:t>م</a:t>
@@ -12989,6 +13079,7 @@
                   <a:srgbClr val="8A6D1E"/>
                 </a:solidFill>
                 <a:latin typeface="Amiri" pitchFamily="2" charset="-78"/>
+                <a:ea typeface="Amiri" pitchFamily="2" charset="-78"/>
                 <a:cs typeface="Amiri" pitchFamily="2" charset="-78"/>
               </a:rPr>
               <a:t>آدَابُ الصَّفِّ</a:t>
@@ -14520,6 +14611,7 @@
                   <a:srgbClr val="D4AF37"/>
                 </a:solidFill>
                 <a:latin typeface="Amiri" pitchFamily="2" charset="-78"/>
+                <a:ea typeface="Amiri" pitchFamily="2" charset="-78"/>
                 <a:cs typeface="Amiri" pitchFamily="2" charset="-78"/>
               </a:rPr>
               <a:t>م</a:t>
@@ -14840,6 +14932,7 @@
                   <a:srgbClr val="8A6D1E"/>
                 </a:solidFill>
                 <a:latin typeface="Amiri" pitchFamily="2" charset="-78"/>
+                <a:ea typeface="Amiri" pitchFamily="2" charset="-78"/>
                 <a:cs typeface="Amiri" pitchFamily="2" charset="-78"/>
               </a:rPr>
               <a:t>خَرِيطَةُ الوَرْشَةِ</a:t>
@@ -15154,6 +15247,7 @@
                   <a:srgbClr val="1B3B6F"/>
                 </a:solidFill>
                 <a:latin typeface="Amiri" pitchFamily="2" charset="-78"/>
+                <a:ea typeface="Amiri" pitchFamily="2" charset="-78"/>
                 <a:cs typeface="Amiri" pitchFamily="2" charset="-78"/>
               </a:rPr>
               <a:t>كَيْفَ</a:t>
@@ -15430,6 +15524,7 @@
                   <a:srgbClr val="1E6B52"/>
                 </a:solidFill>
                 <a:latin typeface="Amiri" pitchFamily="2" charset="-78"/>
+                <a:ea typeface="Amiri" pitchFamily="2" charset="-78"/>
                 <a:cs typeface="Amiri" pitchFamily="2" charset="-78"/>
               </a:rPr>
               <a:t>الاسْتِمَارَةُ</a:t>
@@ -15706,6 +15801,7 @@
                   <a:srgbClr val="1E6B52"/>
                 </a:solidFill>
                 <a:latin typeface="Amiri" pitchFamily="2" charset="-78"/>
+                <a:ea typeface="Amiri" pitchFamily="2" charset="-78"/>
                 <a:cs typeface="Amiri" pitchFamily="2" charset="-78"/>
               </a:rPr>
               <a:t>الرِّسَالَةُ</a:t>
@@ -15982,6 +16078,7 @@
                   <a:srgbClr val="1E6B52"/>
                 </a:solidFill>
                 <a:latin typeface="Amiri" pitchFamily="2" charset="-78"/>
+                <a:ea typeface="Amiri" pitchFamily="2" charset="-78"/>
                 <a:cs typeface="Amiri" pitchFamily="2" charset="-78"/>
               </a:rPr>
               <a:t>المَقَالُ</a:t>
@@ -16258,6 +16355,7 @@
                   <a:srgbClr val="8A6D1E"/>
                 </a:solidFill>
                 <a:latin typeface="Amiri" pitchFamily="2" charset="-78"/>
+                <a:ea typeface="Amiri" pitchFamily="2" charset="-78"/>
                 <a:cs typeface="Amiri" pitchFamily="2" charset="-78"/>
               </a:rPr>
               <a:t>قَيِّمْ</a:t>
@@ -16501,6 +16599,7 @@
                   <a:srgbClr val="D4AF37"/>
                 </a:solidFill>
                 <a:latin typeface="Amiri" pitchFamily="2" charset="-78"/>
+                <a:ea typeface="Amiri" pitchFamily="2" charset="-78"/>
                 <a:cs typeface="Amiri" pitchFamily="2" charset="-78"/>
               </a:rPr>
               <a:t>م</a:t>
@@ -16821,6 +16920,7 @@
                   <a:srgbClr val="8A6D1E"/>
                 </a:solidFill>
                 <a:latin typeface="Amiri" pitchFamily="2" charset="-78"/>
+                <a:ea typeface="Amiri" pitchFamily="2" charset="-78"/>
                 <a:cs typeface="Amiri" pitchFamily="2" charset="-78"/>
               </a:rPr>
               <a:t>امْتِحَانُ الكِتَابَةِ</a:t>
@@ -17445,6 +17545,7 @@
                   <a:srgbClr val="1B3B6F"/>
                 </a:solidFill>
                 <a:latin typeface="Amiri" pitchFamily="2" charset="-78"/>
+                <a:ea typeface="Amiri" pitchFamily="2" charset="-78"/>
                 <a:cs typeface="Amiri" pitchFamily="2" charset="-78"/>
               </a:rPr>
               <a:t>جَرَّبْتُهَا، لٰكِنَّهَا كَانَتْ ضَيِّقَةً</a:t>
@@ -17544,6 +17645,7 @@
                   <a:srgbClr val="1B3B6F"/>
                 </a:solidFill>
                 <a:latin typeface="Amiri" pitchFamily="2" charset="-78"/>
+                <a:ea typeface="Amiri" pitchFamily="2" charset="-78"/>
                 <a:cs typeface="Amiri" pitchFamily="2" charset="-78"/>
               </a:rPr>
               <a:t>كَانَتْ أَغْلَى مِنْ كُلِّ المَلَابِسِ الأُخْرَى</a:t>
@@ -17643,6 +17745,7 @@
                   <a:srgbClr val="1B3B6F"/>
                 </a:solidFill>
                 <a:latin typeface="Amiri" pitchFamily="2" charset="-78"/>
+                <a:ea typeface="Amiri" pitchFamily="2" charset="-78"/>
                 <a:cs typeface="Amiri" pitchFamily="2" charset="-78"/>
               </a:rPr>
               <a:t>أُجَرِّبُ القِطْعَةَ قَبْلَ أَنْ أَشْتَرِيَهَا</a:t>
@@ -17814,6 +17917,7 @@
                   <a:srgbClr val="D4AF37"/>
                 </a:solidFill>
                 <a:latin typeface="Amiri" pitchFamily="2" charset="-78"/>
+                <a:ea typeface="Amiri" pitchFamily="2" charset="-78"/>
                 <a:cs typeface="Amiri" pitchFamily="2" charset="-78"/>
               </a:rPr>
               <a:t>م</a:t>
@@ -18134,6 +18238,7 @@
                   <a:srgbClr val="8A6D1E"/>
                 </a:solidFill>
                 <a:latin typeface="Amiri" pitchFamily="2" charset="-78"/>
+                <a:ea typeface="Amiri" pitchFamily="2" charset="-78"/>
                 <a:cs typeface="Amiri" pitchFamily="2" charset="-78"/>
               </a:rPr>
               <a:t>طَلَبُ شِرَاءٍ عَلَى الإِنْتَرْنِتِ</a:t>
@@ -18490,6 +18595,7 @@
                   <a:srgbClr val="1B3B6F"/>
                 </a:solidFill>
                 <a:latin typeface="Amiri" pitchFamily="2" charset="-78"/>
+                <a:ea typeface="Amiri" pitchFamily="2" charset="-78"/>
                 <a:cs typeface="Amiri" pitchFamily="2" charset="-78"/>
               </a:rPr>
               <a:t>الاسْمُ</a:t>
@@ -18734,6 +18840,7 @@
                   <a:srgbClr val="1B3B6F"/>
                 </a:solidFill>
                 <a:latin typeface="Amiri" pitchFamily="2" charset="-78"/>
+                <a:ea typeface="Amiri" pitchFamily="2" charset="-78"/>
                 <a:cs typeface="Amiri" pitchFamily="2" charset="-78"/>
               </a:rPr>
               <a:t>القِطْعَةُ</a:t>
@@ -18978,6 +19085,7 @@
                   <a:srgbClr val="1B3B6F"/>
                 </a:solidFill>
                 <a:latin typeface="Amiri" pitchFamily="2" charset="-78"/>
+                <a:ea typeface="Amiri" pitchFamily="2" charset="-78"/>
                 <a:cs typeface="Amiri" pitchFamily="2" charset="-78"/>
               </a:rPr>
               <a:t>اللَّوْنُ</a:t>
@@ -19222,6 +19330,7 @@
                   <a:srgbClr val="1B3B6F"/>
                 </a:solidFill>
                 <a:latin typeface="Amiri" pitchFamily="2" charset="-78"/>
+                <a:ea typeface="Amiri" pitchFamily="2" charset="-78"/>
                 <a:cs typeface="Amiri" pitchFamily="2" charset="-78"/>
               </a:rPr>
               <a:t>المَقَاسُ</a:t>
@@ -19466,6 +19575,7 @@
                   <a:srgbClr val="1B3B6F"/>
                 </a:solidFill>
                 <a:latin typeface="Amiri" pitchFamily="2" charset="-78"/>
+                <a:ea typeface="Amiri" pitchFamily="2" charset="-78"/>
                 <a:cs typeface="Amiri" pitchFamily="2" charset="-78"/>
               </a:rPr>
               <a:t>العَدَدُ</a:t>
@@ -19710,6 +19820,7 @@
                   <a:srgbClr val="1B3B6F"/>
                 </a:solidFill>
                 <a:latin typeface="Amiri" pitchFamily="2" charset="-78"/>
+                <a:ea typeface="Amiri" pitchFamily="2" charset="-78"/>
                 <a:cs typeface="Amiri" pitchFamily="2" charset="-78"/>
               </a:rPr>
               <a:t>المَحَلُّ الَّذِي تَسْتَلِمُ مِنْهُ</a:t>
@@ -19954,6 +20065,7 @@
                   <a:srgbClr val="1B3B6F"/>
                 </a:solidFill>
                 <a:latin typeface="Amiri" pitchFamily="2" charset="-78"/>
+                <a:ea typeface="Amiri" pitchFamily="2" charset="-78"/>
                 <a:cs typeface="Amiri" pitchFamily="2" charset="-78"/>
               </a:rPr>
               <a:t>المَادَّةُ المُفَضَّلَةُ</a:t>
@@ -20133,6 +20245,7 @@
                   <a:srgbClr val="1B3B6F"/>
                 </a:solidFill>
                 <a:latin typeface="Amiri" pitchFamily="2" charset="-78"/>
+                <a:ea typeface="Amiri" pitchFamily="2" charset="-78"/>
                 <a:cs typeface="Amiri" pitchFamily="2" charset="-78"/>
               </a:rPr>
               <a:t>جُمْلَةٌ: لِمَاذَا تَحْتَاجُهَا؟</a:t>
@@ -20342,6 +20455,7 @@
                   <a:srgbClr val="D4AF37"/>
                 </a:solidFill>
                 <a:latin typeface="Amiri" pitchFamily="2" charset="-78"/>
+                <a:ea typeface="Amiri" pitchFamily="2" charset="-78"/>
                 <a:cs typeface="Amiri" pitchFamily="2" charset="-78"/>
               </a:rPr>
               <a:t>م</a:t>
@@ -20662,6 +20776,7 @@
                   <a:srgbClr val="8A6D1E"/>
                 </a:solidFill>
                 <a:latin typeface="Amiri" pitchFamily="2" charset="-78"/>
+                <a:ea typeface="Amiri" pitchFamily="2" charset="-78"/>
                 <a:cs typeface="Amiri" pitchFamily="2" charset="-78"/>
               </a:rPr>
               <a:t>نَمُوذَجُ الإِجَابَةِ</a:t>
@@ -20980,6 +21095,7 @@
                   <a:srgbClr val="1B3B6F"/>
                 </a:solidFill>
                 <a:latin typeface="Amiri" pitchFamily="2" charset="-78"/>
+                <a:ea typeface="Amiri" pitchFamily="2" charset="-78"/>
                 <a:cs typeface="Amiri" pitchFamily="2" charset="-78"/>
               </a:rPr>
               <a:t>آدَمُ عَلِيٌّ</a:t>
@@ -21018,6 +21134,7 @@
                   <a:srgbClr val="1B3B6F"/>
                 </a:solidFill>
                 <a:latin typeface="Amiri" pitchFamily="2" charset="-78"/>
+                <a:ea typeface="Amiri" pitchFamily="2" charset="-78"/>
                 <a:cs typeface="Amiri" pitchFamily="2" charset="-78"/>
               </a:rPr>
               <a:t>الاسْمُ</a:t>
@@ -21159,6 +21276,7 @@
                   <a:srgbClr val="1B3B6F"/>
                 </a:solidFill>
                 <a:latin typeface="Amiri" pitchFamily="2" charset="-78"/>
+                <a:ea typeface="Amiri" pitchFamily="2" charset="-78"/>
                 <a:cs typeface="Amiri" pitchFamily="2" charset="-78"/>
               </a:rPr>
               <a:t>سُتْرَةٌ شَتَوِيَّةٌ</a:t>
@@ -21197,6 +21315,7 @@
                   <a:srgbClr val="1B3B6F"/>
                 </a:solidFill>
                 <a:latin typeface="Amiri" pitchFamily="2" charset="-78"/>
+                <a:ea typeface="Amiri" pitchFamily="2" charset="-78"/>
                 <a:cs typeface="Amiri" pitchFamily="2" charset="-78"/>
               </a:rPr>
               <a:t>القِطْعَةُ</a:t>
@@ -21338,6 +21457,7 @@
                   <a:srgbClr val="1B3B6F"/>
                 </a:solidFill>
                 <a:latin typeface="Amiri" pitchFamily="2" charset="-78"/>
+                <a:ea typeface="Amiri" pitchFamily="2" charset="-78"/>
                 <a:cs typeface="Amiri" pitchFamily="2" charset="-78"/>
               </a:rPr>
               <a:t>زَرْقَاءُ غَامِقَةٌ</a:t>
@@ -21376,6 +21496,7 @@
                   <a:srgbClr val="1B3B6F"/>
                 </a:solidFill>
                 <a:latin typeface="Amiri" pitchFamily="2" charset="-78"/>
+                <a:ea typeface="Amiri" pitchFamily="2" charset="-78"/>
                 <a:cs typeface="Amiri" pitchFamily="2" charset="-78"/>
               </a:rPr>
               <a:t>اللَّوْنُ</a:t>
@@ -21517,6 +21638,7 @@
                   <a:srgbClr val="1B3B6F"/>
                 </a:solidFill>
                 <a:latin typeface="Amiri" pitchFamily="2" charset="-78"/>
+                <a:ea typeface="Amiri" pitchFamily="2" charset="-78"/>
                 <a:cs typeface="Amiri" pitchFamily="2" charset="-78"/>
               </a:rPr>
               <a:t>مُتَوَسِّطٌ</a:t>
@@ -21555,6 +21677,7 @@
                   <a:srgbClr val="1B3B6F"/>
                 </a:solidFill>
                 <a:latin typeface="Amiri" pitchFamily="2" charset="-78"/>
+                <a:ea typeface="Amiri" pitchFamily="2" charset="-78"/>
                 <a:cs typeface="Amiri" pitchFamily="2" charset="-78"/>
               </a:rPr>
               <a:t>المَقَاسُ</a:t>
@@ -21696,6 +21819,7 @@
                   <a:srgbClr val="1B3B6F"/>
                 </a:solidFill>
                 <a:latin typeface="Amiri" pitchFamily="2" charset="-78"/>
+                <a:ea typeface="Amiri" pitchFamily="2" charset="-78"/>
                 <a:cs typeface="Amiri" pitchFamily="2" charset="-78"/>
               </a:rPr>
               <a:t>وَاحِدَةٌ</a:t>
@@ -21734,6 +21858,7 @@
                   <a:srgbClr val="1B3B6F"/>
                 </a:solidFill>
                 <a:latin typeface="Amiri" pitchFamily="2" charset="-78"/>
+                <a:ea typeface="Amiri" pitchFamily="2" charset="-78"/>
                 <a:cs typeface="Amiri" pitchFamily="2" charset="-78"/>
               </a:rPr>
               <a:t>العَدَدُ</a:t>
@@ -21875,6 +22000,7 @@
                   <a:srgbClr val="1B3B6F"/>
                 </a:solidFill>
                 <a:latin typeface="Amiri" pitchFamily="2" charset="-78"/>
+                <a:ea typeface="Amiri" pitchFamily="2" charset="-78"/>
                 <a:cs typeface="Amiri" pitchFamily="2" charset="-78"/>
               </a:rPr>
               <a:t>مَحَلُّ وَسَطِ المَدِينَةِ</a:t>
@@ -21913,6 +22039,7 @@
                   <a:srgbClr val="1B3B6F"/>
                 </a:solidFill>
                 <a:latin typeface="Amiri" pitchFamily="2" charset="-78"/>
+                <a:ea typeface="Amiri" pitchFamily="2" charset="-78"/>
                 <a:cs typeface="Amiri" pitchFamily="2" charset="-78"/>
               </a:rPr>
               <a:t>المَحَلُّ الَّذِي تَسْتَلِمُ مِنْهُ</a:t>
@@ -22054,6 +22181,7 @@
                   <a:srgbClr val="1B3B6F"/>
                 </a:solidFill>
                 <a:latin typeface="Amiri" pitchFamily="2" charset="-78"/>
+                <a:ea typeface="Amiri" pitchFamily="2" charset="-78"/>
                 <a:cs typeface="Amiri" pitchFamily="2" charset="-78"/>
               </a:rPr>
               <a:t>الصُّوفُ</a:t>
@@ -22092,6 +22220,7 @@
                   <a:srgbClr val="1B3B6F"/>
                 </a:solidFill>
                 <a:latin typeface="Amiri" pitchFamily="2" charset="-78"/>
+                <a:ea typeface="Amiri" pitchFamily="2" charset="-78"/>
                 <a:cs typeface="Amiri" pitchFamily="2" charset="-78"/>
               </a:rPr>
               <a:t>المَادَّةُ المُفَضَّلَةُ</a:t>
@@ -22233,6 +22362,7 @@
                   <a:srgbClr val="1B3B6F"/>
                 </a:solidFill>
                 <a:latin typeface="Amiri" pitchFamily="2" charset="-78"/>
+                <a:ea typeface="Amiri" pitchFamily="2" charset="-78"/>
                 <a:cs typeface="Amiri" pitchFamily="2" charset="-78"/>
               </a:rPr>
               <a:t>أَحْتَاجُهَا لِأَنَّ سُتْرَتِيَ القَدِيمَةَ أَصْبَحَتْ صَغِيرَةً عَلَيَّ.</a:t>
@@ -22271,6 +22401,7 @@
                   <a:srgbClr val="1B3B6F"/>
                 </a:solidFill>
                 <a:latin typeface="Amiri" pitchFamily="2" charset="-78"/>
+                <a:ea typeface="Amiri" pitchFamily="2" charset="-78"/>
                 <a:cs typeface="Amiri" pitchFamily="2" charset="-78"/>
               </a:rPr>
               <a:t>جُمْلَةٌ: لِمَاذَا تَحْتَاجُهَا؟</a:t>
@@ -22480,6 +22611,7 @@
                   <a:srgbClr val="D4AF37"/>
                 </a:solidFill>
                 <a:latin typeface="Amiri" pitchFamily="2" charset="-78"/>
+                <a:ea typeface="Amiri" pitchFamily="2" charset="-78"/>
                 <a:cs typeface="Amiri" pitchFamily="2" charset="-78"/>
               </a:rPr>
               <a:t>م</a:t>
@@ -22800,6 +22932,7 @@
                   <a:srgbClr val="8A6D1E"/>
                 </a:solidFill>
                 <a:latin typeface="Amiri" pitchFamily="2" charset="-78"/>
+                <a:ea typeface="Amiri" pitchFamily="2" charset="-78"/>
                 <a:cs typeface="Amiri" pitchFamily="2" charset="-78"/>
               </a:rPr>
               <a:t>رِسَالَةٌ عَنْ رِحْلَةِ تَسَوُّقٍ</a:t>
@@ -23275,6 +23408,7 @@
                   <a:srgbClr val="1B3B6F"/>
                 </a:solidFill>
                 <a:latin typeface="Amiri" pitchFamily="2" charset="-78"/>
+                <a:ea typeface="Amiri" pitchFamily="2" charset="-78"/>
                 <a:cs typeface="Amiri" pitchFamily="2" charset="-78"/>
               </a:rPr>
               <a:t>ذَهَبْتُ إِلَى … لِأَنَّ …</a:t>
@@ -23351,6 +23485,7 @@
                   <a:srgbClr val="1B3B6F"/>
                 </a:solidFill>
                 <a:latin typeface="Amiri" pitchFamily="2" charset="-78"/>
+                <a:ea typeface="Amiri" pitchFamily="2" charset="-78"/>
                 <a:cs typeface="Amiri" pitchFamily="2" charset="-78"/>
               </a:rPr>
               <a:t>اشْتَرَيْتُ … بِعِشْرِينَ جُنَيْهًا</a:t>
@@ -23427,6 +23562,7 @@
                   <a:srgbClr val="1B3B6F"/>
                 </a:solidFill>
                 <a:latin typeface="Amiri" pitchFamily="2" charset="-78"/>
+                <a:ea typeface="Amiri" pitchFamily="2" charset="-78"/>
                 <a:cs typeface="Amiri" pitchFamily="2" charset="-78"/>
               </a:rPr>
               <a:t>جَرَّبْتُ … لٰكِنَّهَا كَانَتْ …</a:t>
@@ -23503,6 +23639,7 @@
                   <a:srgbClr val="1B3B6F"/>
                 </a:solidFill>
                 <a:latin typeface="Amiri" pitchFamily="2" charset="-78"/>
+                <a:ea typeface="Amiri" pitchFamily="2" charset="-78"/>
                 <a:cs typeface="Amiri" pitchFamily="2" charset="-78"/>
               </a:rPr>
               <a:t>سَأَلْبَسُهَا فِي …</a:t>
@@ -23674,6 +23811,7 @@
                   <a:srgbClr val="D4AF37"/>
                 </a:solidFill>
                 <a:latin typeface="Amiri" pitchFamily="2" charset="-78"/>
+                <a:ea typeface="Amiri" pitchFamily="2" charset="-78"/>
                 <a:cs typeface="Amiri" pitchFamily="2" charset="-78"/>
               </a:rPr>
               <a:t>م</a:t>
@@ -23994,6 +24132,7 @@
                   <a:srgbClr val="8A6D1E"/>
                 </a:solidFill>
                 <a:latin typeface="Amiri" pitchFamily="2" charset="-78"/>
+                <a:ea typeface="Amiri" pitchFamily="2" charset="-78"/>
                 <a:cs typeface="Amiri" pitchFamily="2" charset="-78"/>
               </a:rPr>
               <a:t>نَصُّ السُّؤَالِ</a:t>
@@ -24274,6 +24413,7 @@
                   <a:srgbClr val="1B3B6F"/>
                 </a:solidFill>
                 <a:latin typeface="Amiri" pitchFamily="2" charset="-78"/>
+                <a:ea typeface="Amiri" pitchFamily="2" charset="-78"/>
                 <a:cs typeface="Amiri" pitchFamily="2" charset="-78"/>
               </a:rPr>
               <a:t>ذَهَبْتَ لِتَشْتَرِيَ مَلَابِسَ أَمْسِ. اكْتُبْ رِسَالَةً إِلَى صَدِيقِكَ (٨٠–٩٠ كَلِمَةً).</a:t>
@@ -24415,6 +24555,7 @@
                   <a:srgbClr val="1B3B6F"/>
                 </a:solidFill>
                 <a:latin typeface="Amiri" pitchFamily="2" charset="-78"/>
+                <a:ea typeface="Amiri" pitchFamily="2" charset="-78"/>
                 <a:cs typeface="Amiri" pitchFamily="2" charset="-78"/>
               </a:rPr>
               <a:t>أَيْنَ ذَهَبْتَ؟ وَمَعَ مَنْ؟ وَلِمَاذَا؟</a:t>
@@ -24556,6 +24697,7 @@
                   <a:srgbClr val="1B3B6F"/>
                 </a:solidFill>
                 <a:latin typeface="Amiri" pitchFamily="2" charset="-78"/>
+                <a:ea typeface="Amiri" pitchFamily="2" charset="-78"/>
                 <a:cs typeface="Amiri" pitchFamily="2" charset="-78"/>
               </a:rPr>
               <a:t>مَاذَا اشْتَرَيْتَ؟ (الأَلْوَانُ وَالأَسْعَارُ)</a:t>
@@ -24697,6 +24839,7 @@
                   <a:srgbClr val="1B3B6F"/>
                 </a:solidFill>
                 <a:latin typeface="Amiri" pitchFamily="2" charset="-78"/>
+                <a:ea typeface="Amiri" pitchFamily="2" charset="-78"/>
                 <a:cs typeface="Amiri" pitchFamily="2" charset="-78"/>
               </a:rPr>
               <a:t>مَاذَا جَرَّبْتَ وَلَمْ تَشْتَرِهِ؟ وَلِمَاذَا؟</a:t>
@@ -24838,6 +24981,7 @@
                   <a:srgbClr val="1B3B6F"/>
                 </a:solidFill>
                 <a:latin typeface="Amiri" pitchFamily="2" charset="-78"/>
+                <a:ea typeface="Amiri" pitchFamily="2" charset="-78"/>
                 <a:cs typeface="Amiri" pitchFamily="2" charset="-78"/>
               </a:rPr>
               <a:t>هَلْ تُفَضِّلُ المَحَلَّاتِ أَمِ الإِنْتَرْنِتَ؟ وَمَتَى سَتَلْبَسُ مَلَابِسَكَ الجَدِيدَةَ؟</a:t>
@@ -25047,6 +25191,7 @@
                   <a:srgbClr val="D4AF37"/>
                 </a:solidFill>
                 <a:latin typeface="Amiri" pitchFamily="2" charset="-78"/>
+                <a:ea typeface="Amiri" pitchFamily="2" charset="-78"/>
                 <a:cs typeface="Amiri" pitchFamily="2" charset="-78"/>
               </a:rPr>
               <a:t>م</a:t>
@@ -25367,6 +25512,7 @@
                   <a:srgbClr val="8A6D1E"/>
                 </a:solidFill>
                 <a:latin typeface="Amiri" pitchFamily="2" charset="-78"/>
+                <a:ea typeface="Amiri" pitchFamily="2" charset="-78"/>
                 <a:cs typeface="Amiri" pitchFamily="2" charset="-78"/>
               </a:rPr>
               <a:t>قَوَالِبُ الكِتَابَةِ</a:t>
@@ -25647,6 +25793,7 @@
                   <a:srgbClr val="1B3B6F"/>
                 </a:solidFill>
                 <a:latin typeface="Amiri" pitchFamily="2" charset="-78"/>
+                <a:ea typeface="Amiri" pitchFamily="2" charset="-78"/>
                 <a:cs typeface="Amiri" pitchFamily="2" charset="-78"/>
               </a:rPr>
               <a:t>مَرْحَبًا يَا ______ ، كَيْفَ حَالُكَ؟</a:t>
@@ -25853,6 +26000,7 @@
                   <a:srgbClr val="1B3B6F"/>
                 </a:solidFill>
                 <a:latin typeface="Amiri" pitchFamily="2" charset="-78"/>
+                <a:ea typeface="Amiri" pitchFamily="2" charset="-78"/>
                 <a:cs typeface="Amiri" pitchFamily="2" charset="-78"/>
               </a:rPr>
               <a:t>أَمْسِ ذَهَبْتُ إِلَى ______ مَعَ ______ ، لِأَنَّ ______ .</a:t>
@@ -26059,6 +26207,7 @@
                   <a:srgbClr val="1B3B6F"/>
                 </a:solidFill>
                 <a:latin typeface="Amiri" pitchFamily="2" charset="-78"/>
+                <a:ea typeface="Amiri" pitchFamily="2" charset="-78"/>
                 <a:cs typeface="Amiri" pitchFamily="2" charset="-78"/>
               </a:rPr>
               <a:t>اشْتَرَيْتُ ______ ______ ، وَكَانَ ثَمَنُهُ ______ جُنَيْهًا.</a:t>
@@ -26265,6 +26414,7 @@
                   <a:srgbClr val="1B3B6F"/>
                 </a:solidFill>
                 <a:latin typeface="Amiri" pitchFamily="2" charset="-78"/>
+                <a:ea typeface="Amiri" pitchFamily="2" charset="-78"/>
                 <a:cs typeface="Amiri" pitchFamily="2" charset="-78"/>
               </a:rPr>
               <a:t>جَرَّبْتُ ______ ، لٰكِنَّهَا كَانَتْ ______ .</a:t>
@@ -26471,6 +26621,7 @@
                   <a:srgbClr val="1B3B6F"/>
                 </a:solidFill>
                 <a:latin typeface="Amiri" pitchFamily="2" charset="-78"/>
+                <a:ea typeface="Amiri" pitchFamily="2" charset="-78"/>
                 <a:cs typeface="Amiri" pitchFamily="2" charset="-78"/>
               </a:rPr>
               <a:t>أُفَضِّلُ ______ لِأَنَّ ______ . سَأَلْبَسُهَا فِي ______ .</a:t>
@@ -26677,6 +26828,7 @@
                   <a:srgbClr val="1B3B6F"/>
                 </a:solidFill>
                 <a:latin typeface="Amiri" pitchFamily="2" charset="-78"/>
+                <a:ea typeface="Amiri" pitchFamily="2" charset="-78"/>
                 <a:cs typeface="Amiri" pitchFamily="2" charset="-78"/>
               </a:rPr>
               <a:t>مَعَ السَّلَامَةِ، ______</a:t>
@@ -26916,13 +27068,9 @@
     <a:fontScheme name="Office">
       <a:majorFont>
         <a:latin typeface="Calibri Light" panose="020F0302020204030204"/>
-        <a:ea typeface=""/>
-        <a:cs typeface=""/>
-        <a:font script="Jpan" typeface="游ゴシック Light"/>
-        <a:font script="Hang" typeface="맑은 고딕"/>
-        <a:font script="Hans" typeface="等线 Light"/>
-        <a:font script="Hant" typeface="新細明體"/>
-        <a:font script="Arab" typeface="Times New Roman"/>
+        <a:ea typeface="Amiri" pitchFamily="2" charset="-78"/>
+        <a:cs typeface="Amiri" pitchFamily="2" charset="-78"/>
+        <a:font script="Arab" typeface="Amiri"/>
         <a:font script="Hebr" typeface="Times New Roman"/>
         <a:font script="Thai" typeface="Angsana New"/>
         <a:font script="Ethi" typeface="Nyala"/>
@@ -26968,13 +27116,9 @@
       </a:majorFont>
       <a:minorFont>
         <a:latin typeface="Calibri" panose="020F0502020204030204"/>
-        <a:ea typeface=""/>
-        <a:cs typeface=""/>
-        <a:font script="Jpan" typeface="游ゴシック"/>
-        <a:font script="Hang" typeface="맑은 고딕"/>
-        <a:font script="Hans" typeface="等线"/>
-        <a:font script="Hant" typeface="新細明體"/>
-        <a:font script="Arab" typeface="Arial"/>
+        <a:ea typeface="Amiri" pitchFamily="2" charset="-78"/>
+        <a:cs typeface="Amiri" pitchFamily="2" charset="-78"/>
+        <a:font script="Arab" typeface="Amiri"/>
         <a:font script="Hebr" typeface="Arial"/>
         <a:font script="Thai" typeface="Cordia New"/>
         <a:font script="Ethi" typeface="Nyala"/>

--- a/Topic_B/Exam_Practice/TB-L07_Writing_Workshop_Clothes_Accessories_and_Shopping.pptx
+++ b/Topic_B/Exam_Practice/TB-L07_Writing_Workshop_Clothes_Accessories_and_Shopping.pptx
@@ -3848,7 +3848,7 @@
                 <a:solidFill>
                   <a:srgbClr val="FFFFFF"/>
                 </a:solidFill>
-                <a:latin typeface="Calibri" pitchFamily="34" charset="0"/>
+                <a:latin typeface="Amiri" pitchFamily="2" charset="-78"/>
                 <a:ea typeface="Amiri" pitchFamily="2" charset="-78"/>
                 <a:cs typeface="Amiri" pitchFamily="2" charset="-78"/>
               </a:rPr>
@@ -3914,7 +3914,7 @@
                 <a:solidFill>
                   <a:srgbClr val="FFFFFF"/>
                 </a:solidFill>
-                <a:latin typeface="Calibri" pitchFamily="34" charset="0"/>
+                <a:latin typeface="Amiri" pitchFamily="2" charset="-78"/>
                 <a:ea typeface="Amiri" pitchFamily="2" charset="-78"/>
                 <a:cs typeface="Amiri" pitchFamily="2" charset="-78"/>
               </a:rPr>
@@ -3980,7 +3980,7 @@
                 <a:solidFill>
                   <a:srgbClr val="FFFFFF"/>
                 </a:solidFill>
-                <a:latin typeface="Calibri" pitchFamily="34" charset="0"/>
+                <a:latin typeface="Amiri" pitchFamily="2" charset="-78"/>
                 <a:ea typeface="Amiri" pitchFamily="2" charset="-78"/>
                 <a:cs typeface="Amiri" pitchFamily="2" charset="-78"/>
               </a:rPr>
@@ -4046,7 +4046,7 @@
                 <a:solidFill>
                   <a:srgbClr val="FFFFFF"/>
                 </a:solidFill>
-                <a:latin typeface="Calibri" pitchFamily="34" charset="0"/>
+                <a:latin typeface="Amiri" pitchFamily="2" charset="-78"/>
                 <a:ea typeface="Amiri" pitchFamily="2" charset="-78"/>
                 <a:cs typeface="Amiri" pitchFamily="2" charset="-78"/>
               </a:rPr>
@@ -4844,7 +4844,7 @@
                 <a:solidFill>
                   <a:srgbClr val="FFFFFF"/>
                 </a:solidFill>
-                <a:latin typeface="Calibri" pitchFamily="34" charset="0"/>
+                <a:latin typeface="Amiri" pitchFamily="2" charset="-78"/>
                 <a:ea typeface="Amiri" pitchFamily="2" charset="-78"/>
                 <a:cs typeface="Amiri" pitchFamily="2" charset="-78"/>
               </a:rPr>
@@ -4910,7 +4910,7 @@
                 <a:solidFill>
                   <a:srgbClr val="FFFFFF"/>
                 </a:solidFill>
-                <a:latin typeface="Calibri" pitchFamily="34" charset="0"/>
+                <a:latin typeface="Amiri" pitchFamily="2" charset="-78"/>
                 <a:ea typeface="Amiri" pitchFamily="2" charset="-78"/>
                 <a:cs typeface="Amiri" pitchFamily="2" charset="-78"/>
               </a:rPr>
@@ -4976,7 +4976,7 @@
                 <a:solidFill>
                   <a:srgbClr val="FFFFFF"/>
                 </a:solidFill>
-                <a:latin typeface="Calibri" pitchFamily="34" charset="0"/>
+                <a:latin typeface="Amiri" pitchFamily="2" charset="-78"/>
                 <a:ea typeface="Amiri" pitchFamily="2" charset="-78"/>
                 <a:cs typeface="Amiri" pitchFamily="2" charset="-78"/>
               </a:rPr>
@@ -5042,7 +5042,7 @@
                 <a:solidFill>
                   <a:srgbClr val="FFFFFF"/>
                 </a:solidFill>
-                <a:latin typeface="Calibri" pitchFamily="34" charset="0"/>
+                <a:latin typeface="Amiri" pitchFamily="2" charset="-78"/>
                 <a:ea typeface="Amiri" pitchFamily="2" charset="-78"/>
                 <a:cs typeface="Amiri" pitchFamily="2" charset="-78"/>
               </a:rPr>
@@ -8602,7 +8602,7 @@
                 <a:solidFill>
                   <a:srgbClr val="FFFFFF"/>
                 </a:solidFill>
-                <a:latin typeface="Calibri" pitchFamily="34" charset="0"/>
+                <a:latin typeface="Amiri" pitchFamily="2" charset="-78"/>
                 <a:ea typeface="Amiri" pitchFamily="2" charset="-78"/>
                 <a:cs typeface="Amiri" pitchFamily="2" charset="-78"/>
               </a:rPr>
@@ -8668,7 +8668,7 @@
                 <a:solidFill>
                   <a:srgbClr val="FFFFFF"/>
                 </a:solidFill>
-                <a:latin typeface="Calibri" pitchFamily="34" charset="0"/>
+                <a:latin typeface="Amiri" pitchFamily="2" charset="-78"/>
                 <a:ea typeface="Amiri" pitchFamily="2" charset="-78"/>
                 <a:cs typeface="Amiri" pitchFamily="2" charset="-78"/>
               </a:rPr>
@@ -8734,7 +8734,7 @@
                 <a:solidFill>
                   <a:srgbClr val="FFFFFF"/>
                 </a:solidFill>
-                <a:latin typeface="Calibri" pitchFamily="34" charset="0"/>
+                <a:latin typeface="Amiri" pitchFamily="2" charset="-78"/>
                 <a:ea typeface="Amiri" pitchFamily="2" charset="-78"/>
                 <a:cs typeface="Amiri" pitchFamily="2" charset="-78"/>
               </a:rPr>
@@ -8800,7 +8800,7 @@
                 <a:solidFill>
                   <a:srgbClr val="FFFFFF"/>
                 </a:solidFill>
-                <a:latin typeface="Calibri" pitchFamily="34" charset="0"/>
+                <a:latin typeface="Amiri" pitchFamily="2" charset="-78"/>
                 <a:ea typeface="Amiri" pitchFamily="2" charset="-78"/>
                 <a:cs typeface="Amiri" pitchFamily="2" charset="-78"/>
               </a:rPr>
@@ -9587,7 +9587,7 @@
                 <a:solidFill>
                   <a:srgbClr val="FFFFFF"/>
                 </a:solidFill>
-                <a:latin typeface="Calibri" pitchFamily="34" charset="0"/>
+                <a:latin typeface="Amiri" pitchFamily="2" charset="-78"/>
                 <a:ea typeface="Amiri" pitchFamily="2" charset="-78"/>
                 <a:cs typeface="Amiri" pitchFamily="2" charset="-78"/>
               </a:rPr>
@@ -9653,7 +9653,7 @@
                 <a:solidFill>
                   <a:srgbClr val="FFFFFF"/>
                 </a:solidFill>
-                <a:latin typeface="Calibri" pitchFamily="34" charset="0"/>
+                <a:latin typeface="Amiri" pitchFamily="2" charset="-78"/>
                 <a:ea typeface="Amiri" pitchFamily="2" charset="-78"/>
                 <a:cs typeface="Amiri" pitchFamily="2" charset="-78"/>
               </a:rPr>
@@ -9719,7 +9719,7 @@
                 <a:solidFill>
                   <a:srgbClr val="FFFFFF"/>
                 </a:solidFill>
-                <a:latin typeface="Calibri" pitchFamily="34" charset="0"/>
+                <a:latin typeface="Amiri" pitchFamily="2" charset="-78"/>
                 <a:ea typeface="Amiri" pitchFamily="2" charset="-78"/>
                 <a:cs typeface="Amiri" pitchFamily="2" charset="-78"/>
               </a:rPr>
@@ -9785,7 +9785,7 @@
                 <a:solidFill>
                   <a:srgbClr val="FFFFFF"/>
                 </a:solidFill>
-                <a:latin typeface="Calibri" pitchFamily="34" charset="0"/>
+                <a:latin typeface="Amiri" pitchFamily="2" charset="-78"/>
                 <a:ea typeface="Amiri" pitchFamily="2" charset="-78"/>
                 <a:cs typeface="Amiri" pitchFamily="2" charset="-78"/>
               </a:rPr>
@@ -10572,7 +10572,7 @@
                 <a:solidFill>
                   <a:srgbClr val="FFFFFF"/>
                 </a:solidFill>
-                <a:latin typeface="Calibri" pitchFamily="34" charset="0"/>
+                <a:latin typeface="Amiri" pitchFamily="2" charset="-78"/>
                 <a:ea typeface="Amiri" pitchFamily="2" charset="-78"/>
                 <a:cs typeface="Amiri" pitchFamily="2" charset="-78"/>
               </a:rPr>
@@ -10638,7 +10638,7 @@
                 <a:solidFill>
                   <a:srgbClr val="FFFFFF"/>
                 </a:solidFill>
-                <a:latin typeface="Calibri" pitchFamily="34" charset="0"/>
+                <a:latin typeface="Amiri" pitchFamily="2" charset="-78"/>
                 <a:ea typeface="Amiri" pitchFamily="2" charset="-78"/>
                 <a:cs typeface="Amiri" pitchFamily="2" charset="-78"/>
               </a:rPr>
@@ -10704,7 +10704,7 @@
                 <a:solidFill>
                   <a:srgbClr val="FFFFFF"/>
                 </a:solidFill>
-                <a:latin typeface="Calibri" pitchFamily="34" charset="0"/>
+                <a:latin typeface="Amiri" pitchFamily="2" charset="-78"/>
                 <a:ea typeface="Amiri" pitchFamily="2" charset="-78"/>
                 <a:cs typeface="Amiri" pitchFamily="2" charset="-78"/>
               </a:rPr>
@@ -10770,7 +10770,7 @@
                 <a:solidFill>
                   <a:srgbClr val="FFFFFF"/>
                 </a:solidFill>
-                <a:latin typeface="Calibri" pitchFamily="34" charset="0"/>
+                <a:latin typeface="Amiri" pitchFamily="2" charset="-78"/>
                 <a:ea typeface="Amiri" pitchFamily="2" charset="-78"/>
                 <a:cs typeface="Amiri" pitchFamily="2" charset="-78"/>
               </a:rPr>
